--- a/outputs/3ps/3Ps_Ceara_Executivo.pptx
+++ b/outputs/3ps/3Ps_Ceara_Executivo.pptx
@@ -6356,7 +6356,7 @@
                 </a:solidFill>
                 <a:latin typeface="Aptos"/>
               </a:rPr>
-              <a:t>As outras 116 visitas do painel ao lado ainda estão sem motivo registrado — classificação completa até 08/07.</a:t>
+              <a:t>As outras 111 visitas do painel ao lado ainda estão sem motivo registrado — reconciliação com o BI até 08/07.</a:t>
             </a:r>
           </a:p>
         </p:txBody>
@@ -6418,7 +6418,7 @@
         <p:spPr>
           <a:xfrm>
             <a:off x="6743700" y="1581150"/>
-            <a:ext cx="2857500" cy="190500"/>
+            <a:ext cx="3048000" cy="190500"/>
           </a:xfrm>
           <a:prstGeom prst="rect">
             <a:avLst/>
@@ -6456,8 +6456,8 @@
         </p:nvSpPr>
         <p:spPr>
           <a:xfrm>
-            <a:off x="8953500" y="1600200"/>
-            <a:ext cx="2514600" cy="171450"/>
+            <a:off x="8820150" y="1600200"/>
+            <a:ext cx="2647950" cy="171450"/>
           </a:xfrm>
           <a:prstGeom prst="rect">
             <a:avLst/>
@@ -6482,7 +6482,7 @@
                 </a:solidFill>
                 <a:latin typeface="Aptos"/>
               </a:rPr>
-              <a:t>só 212 têm motivo registrado</a:t>
+              <a:t>217 têm motivo e submotivo</a:t>
             </a:r>
           </a:p>
         </p:txBody>
@@ -7199,7 +7199,7 @@
         <p:spPr>
           <a:xfrm>
             <a:off x="6743700" y="3619500"/>
-            <a:ext cx="4705350" cy="704850"/>
+            <a:ext cx="4705350" cy="876300"/>
           </a:xfrm>
           <a:prstGeom prst="rect">
             <a:avLst/>
@@ -7243,7 +7243,7 @@
         <p:spPr>
           <a:xfrm>
             <a:off x="6743700" y="3619500"/>
-            <a:ext cx="47625" cy="704850"/>
+            <a:ext cx="47625" cy="876300"/>
           </a:xfrm>
           <a:prstGeom prst="rect">
             <a:avLst/>
@@ -7286,8 +7286,8 @@
         </p:nvSpPr>
         <p:spPr>
           <a:xfrm>
-            <a:off x="6896100" y="3829050"/>
-            <a:ext cx="990600" cy="285750"/>
+            <a:off x="6896100" y="3733800"/>
+            <a:ext cx="857250" cy="285750"/>
           </a:xfrm>
           <a:prstGeom prst="rect">
             <a:avLst/>
@@ -7312,7 +7312,7 @@
                 </a:solidFill>
                 <a:latin typeface="Aptos"/>
               </a:rPr>
-              <a:t>8 em 10</a:t>
+              <a:t>78%</a:t>
             </a:r>
           </a:p>
         </p:txBody>
@@ -7325,8 +7325,8 @@
         </p:nvSpPr>
         <p:spPr>
           <a:xfrm>
-            <a:off x="7943850" y="3695700"/>
-            <a:ext cx="3409950" cy="571500"/>
+            <a:off x="7829550" y="3695700"/>
+            <a:ext cx="3505200" cy="419100"/>
           </a:xfrm>
           <a:prstGeom prst="rect">
             <a:avLst/>
@@ -7351,14 +7351,53 @@
                 </a:solidFill>
                 <a:latin typeface="Aptos"/>
               </a:rPr>
-              <a:t>improdutivas classificadas nascem antes do despacho: OS mal aberta, cliente não confirmado ou falha de rede já conhecida. Cobrar só o técnico não resolve.</a:t>
-            </a:r>
-          </a:p>
-        </p:txBody>
-      </p:sp>
-      <p:sp>
-        <p:nvSpPr>
-          <p:cNvPr id="65" name="Rectangle 64"/>
+              <a:t>das improdutivas classificadas nascem antes do despacho: OS mal aberta, cliente não confirmado ou falha de rede já conhecida. Cobrar só o técnico não resolve.</a:t>
+            </a:r>
+          </a:p>
+        </p:txBody>
+      </p:sp>
+      <p:sp>
+        <p:nvSpPr>
+          <p:cNvPr id="65" name="TextBox 64"/>
+          <p:cNvSpPr txBox="1"/>
+          <p:nvPr/>
+        </p:nvSpPr>
+        <p:spPr>
+          <a:xfrm>
+            <a:off x="6896100" y="4133850"/>
+            <a:ext cx="4438650" cy="304800"/>
+          </a:xfrm>
+          <a:prstGeom prst="rect">
+            <a:avLst/>
+          </a:prstGeom>
+          <a:noFill/>
+        </p:spPr>
+        <p:txBody>
+          <a:bodyPr wrap="square" anchor="t" lIns="0" rIns="0" tIns="0" bIns="0">
+            <a:spAutoFit/>
+          </a:bodyPr>
+          <a:lstStyle/>
+          <a:p>
+            <a:pPr algn="l">
+              <a:lnSpc>
+                <a:spcPct val="106000"/>
+              </a:lnSpc>
+            </a:pPr>
+            <a:r>
+              <a:rPr sz="900" b="0">
+                <a:solidFill>
+                  <a:srgbClr val="4A5B52"/>
+                </a:solidFill>
+                <a:latin typeface="Aptos"/>
+              </a:rPr>
+              <a:t>As outras 111 (34%) não têm motivo no BI — não é mais recorte de tela, é lacuna real do sistema, ainda sem explicação.</a:t>
+            </a:r>
+          </a:p>
+        </p:txBody>
+      </p:sp>
+      <p:sp>
+        <p:nvSpPr>
+          <p:cNvPr id="66" name="Rectangle 65"/>
           <p:cNvSpPr/>
           <p:nvPr/>
         </p:nvSpPr>
@@ -7402,7 +7441,7 @@
       </p:sp>
       <p:sp>
         <p:nvSpPr>
-          <p:cNvPr id="66" name="Rectangle 65"/>
+          <p:cNvPr id="67" name="Rectangle 66"/>
           <p:cNvSpPr/>
           <p:nvPr/>
         </p:nvSpPr>
@@ -7446,7 +7485,7 @@
       </p:sp>
       <p:sp>
         <p:nvSpPr>
-          <p:cNvPr id="67" name="TextBox 66"/>
+          <p:cNvPr id="68" name="TextBox 67"/>
           <p:cNvSpPr txBox="1"/>
           <p:nvPr/>
         </p:nvSpPr>
@@ -7485,7 +7524,7 @@
       </p:sp>
       <p:sp>
         <p:nvSpPr>
-          <p:cNvPr id="68" name="TextBox 67"/>
+          <p:cNvPr id="69" name="TextBox 68"/>
           <p:cNvSpPr txBox="1"/>
           <p:nvPr/>
         </p:nvSpPr>
@@ -7524,7 +7563,7 @@
       </p:sp>
       <p:sp>
         <p:nvSpPr>
-          <p:cNvPr id="69" name="TextBox 68"/>
+          <p:cNvPr id="70" name="TextBox 69"/>
           <p:cNvSpPr txBox="1"/>
           <p:nvPr/>
         </p:nvSpPr>
@@ -7563,7 +7602,7 @@
       </p:sp>
       <p:sp>
         <p:nvSpPr>
-          <p:cNvPr id="70" name="Rectangle 69"/>
+          <p:cNvPr id="71" name="Rectangle 70"/>
           <p:cNvSpPr/>
           <p:nvPr/>
         </p:nvSpPr>
@@ -7607,7 +7646,7 @@
       </p:sp>
       <p:sp>
         <p:nvSpPr>
-          <p:cNvPr id="71" name="Rectangle 70"/>
+          <p:cNvPr id="72" name="Rectangle 71"/>
           <p:cNvSpPr/>
           <p:nvPr/>
         </p:nvSpPr>
@@ -7651,7 +7690,7 @@
       </p:sp>
       <p:sp>
         <p:nvSpPr>
-          <p:cNvPr id="72" name="TextBox 71"/>
+          <p:cNvPr id="73" name="TextBox 72"/>
           <p:cNvSpPr txBox="1"/>
           <p:nvPr/>
         </p:nvSpPr>
@@ -7690,7 +7729,7 @@
       </p:sp>
       <p:sp>
         <p:nvSpPr>
-          <p:cNvPr id="73" name="TextBox 72"/>
+          <p:cNvPr id="74" name="TextBox 73"/>
           <p:cNvSpPr txBox="1"/>
           <p:nvPr/>
         </p:nvSpPr>
@@ -7729,7 +7768,7 @@
       </p:sp>
       <p:sp>
         <p:nvSpPr>
-          <p:cNvPr id="74" name="TextBox 73"/>
+          <p:cNvPr id="75" name="TextBox 74"/>
           <p:cNvSpPr txBox="1"/>
           <p:nvPr/>
         </p:nvSpPr>
@@ -7768,7 +7807,7 @@
       </p:sp>
       <p:sp>
         <p:nvSpPr>
-          <p:cNvPr id="75" name="Rectangle 74"/>
+          <p:cNvPr id="76" name="Rectangle 75"/>
           <p:cNvSpPr/>
           <p:nvPr/>
         </p:nvSpPr>
@@ -7812,7 +7851,7 @@
       </p:sp>
       <p:sp>
         <p:nvSpPr>
-          <p:cNvPr id="76" name="Rectangle 75"/>
+          <p:cNvPr id="77" name="Rectangle 76"/>
           <p:cNvSpPr/>
           <p:nvPr/>
         </p:nvSpPr>
@@ -7856,7 +7895,7 @@
       </p:sp>
       <p:sp>
         <p:nvSpPr>
-          <p:cNvPr id="77" name="TextBox 76"/>
+          <p:cNvPr id="78" name="TextBox 77"/>
           <p:cNvSpPr txBox="1"/>
           <p:nvPr/>
         </p:nvSpPr>
@@ -7895,7 +7934,7 @@
       </p:sp>
       <p:sp>
         <p:nvSpPr>
-          <p:cNvPr id="78" name="TextBox 77"/>
+          <p:cNvPr id="79" name="TextBox 78"/>
           <p:cNvSpPr txBox="1"/>
           <p:nvPr/>
         </p:nvSpPr>
@@ -7934,7 +7973,7 @@
       </p:sp>
       <p:sp>
         <p:nvSpPr>
-          <p:cNvPr id="79" name="TextBox 78"/>
+          <p:cNvPr id="80" name="TextBox 79"/>
           <p:cNvSpPr txBox="1"/>
           <p:nvPr/>
         </p:nvSpPr>
@@ -11824,7 +11863,7 @@
                           </a:solidFill>
                           <a:latin typeface="Aptos"/>
                         </a:rPr>
-                        <a:t>apenas 212 têm motivo registrado</a:t>
+                        <a:t>217 têm motivo e submotivo registrado</a:t>
                       </a:r>
                     </a:p>
                   </a:txBody>
@@ -11851,7 +11890,7 @@
                           </a:solidFill>
                           <a:latin typeface="Aptos"/>
                         </a:rPr>
-                        <a:t>Entre as registradas, 8 em 10 nascem antes do despacho: OS aberta sem necessidade, cliente não confirmado, reagendamento não retirado da fila e falha massiva na rede.</a:t>
+                        <a:t>Entre as 217 classificadas, 78% nascem antes do despacho: OS aberta sem necessidade, cliente não confirmado, reagendamento não retirado da fila e falha massiva. As outras 111 (34%) não têm motivo no BI — lacuna real, não recorte de tela.</a:t>
                       </a:r>
                     </a:p>
                   </a:txBody>
@@ -11878,7 +11917,7 @@
                           </a:solidFill>
                           <a:latin typeface="Aptos"/>
                         </a:rPr>
-                        <a:t>Registrar o motivo das 116 restantes; travar abertura de OS sem validação técnica; confirmar o cliente antes do despacho; suspender despacho em área com falha massiva ativa.</a:t>
+                        <a:t>Reconciliar com o BI por que 111 baixas não têm motivo registrado; travar abertura de OS sem validação técnica; confirmar o cliente antes do despacho; suspender despacho em área com falha massiva ativa.</a:t>
                       </a:r>
                     </a:p>
                   </a:txBody>

--- a/outputs/3ps/3Ps_Ceara_Executivo.pptx
+++ b/outputs/3ps/3Ps_Ceara_Executivo.pptx
@@ -9314,8 +9314,8 @@
         </p:nvSpPr>
         <p:spPr>
           <a:xfrm>
-            <a:off x="742950" y="3543300"/>
-            <a:ext cx="3886200" cy="1447800"/>
+            <a:off x="742950" y="3486150"/>
+            <a:ext cx="3886200" cy="1600200"/>
           </a:xfrm>
           <a:prstGeom prst="rect">
             <a:avLst/>
@@ -9358,8 +9358,8 @@
         </p:nvSpPr>
         <p:spPr>
           <a:xfrm>
-            <a:off x="742950" y="3543300"/>
-            <a:ext cx="47625" cy="1447800"/>
+            <a:off x="742950" y="3486150"/>
+            <a:ext cx="47625" cy="1600200"/>
           </a:xfrm>
           <a:prstGeom prst="rect">
             <a:avLst/>
@@ -9402,7 +9402,7 @@
         </p:nvSpPr>
         <p:spPr>
           <a:xfrm>
-            <a:off x="895350" y="3676650"/>
+            <a:off x="895350" y="3600450"/>
             <a:ext cx="762000" cy="285750"/>
           </a:xfrm>
           <a:prstGeom prst="rect">
@@ -9441,8 +9441,8 @@
         </p:nvSpPr>
         <p:spPr>
           <a:xfrm>
-            <a:off x="895350" y="3981450"/>
-            <a:ext cx="3581400" cy="952500"/>
+            <a:off x="895350" y="3905250"/>
+            <a:ext cx="3581400" cy="1104900"/>
           </a:xfrm>
           <a:prstGeom prst="rect">
             <a:avLst/>
@@ -9461,13 +9461,13 @@
               </a:lnSpc>
             </a:pPr>
             <a:r>
-              <a:rPr sz="1150" b="0">
+              <a:rPr sz="1050" b="0">
                 <a:solidFill>
                   <a:srgbClr val="4A5B52"/>
                 </a:solidFill>
                 <a:latin typeface="Aptos"/>
               </a:rPr>
-              <a:t>de toda a perda do Ceará está numa única área: a de Pedro Henrique, com 21 dos 22 técnicos abaixo da meta. A mesma área lidera as visitas improdutivas (82 de 328). É por ela que a recuperação começa.</a:t>
+              <a:t>de toda a perda do Ceará está numa única área — que também perde 27% da própria capacidade esperada (167 de 230 OS possíveis), quase 50% pior que a média do Ceará (19%). 21 dos 22 técnicos estão abaixo da meta; mesma área lidera as visitas improdutivas (82 de 328).</a:t>
             </a:r>
           </a:p>
         </p:txBody>

--- a/outputs/3ps/3Ps_Ceara_Executivo.pptx
+++ b/outputs/3ps/3Ps_Ceara_Executivo.pptx
@@ -3408,7 +3408,7 @@
                 </a:solidFill>
                 <a:latin typeface="Aptos Display"/>
               </a:rPr>
-              <a:t>Fortaleza concentra o risco; o Interior precisa proteger o Prazo</a:t>
+              <a:t>Fortaleza concentra o risco nos quatro indicadores; o Interior está estável</a:t>
             </a:r>
           </a:p>
         </p:txBody>
@@ -3447,7 +3447,7 @@
                 </a:solidFill>
                 <a:latin typeface="Aptos"/>
               </a:rPr>
-              <a:t>Fortaleza (C.27) está abaixo da meta nos três indicadores. O Interior (C.26) cumpre Presença e fechou o Prazo no limite, mas começou a semana com fila de ordens acima de um dia de trabalho.</a:t>
+              <a:t>Fortaleza (C.27) está abaixo da meta em Presença, Produção e Prazo, e também começou a semana com fila de ordens acima de um dia de trabalho. O Interior (C.26) está dentro da meta em Presença e fila, e fechou o Prazo apenas no limite.</a:t>
             </a:r>
           </a:p>
         </p:txBody>
@@ -3864,11 +3864,11 @@
                       <a:r>
                         <a:rPr sz="1600" b="1">
                           <a:solidFill>
-                            <a:srgbClr val="D94545"/>
+                            <a:srgbClr val="13853A"/>
                           </a:solidFill>
                           <a:latin typeface="Aptos"/>
                         </a:rPr>
-                        <a:t>1,125 dia</a:t>
+                        <a:t>0,820 dia</a:t>
                       </a:r>
                     </a:p>
                     <a:p>
@@ -3884,7 +3884,7 @@
                           </a:solidFill>
                           <a:latin typeface="Aptos"/>
                         </a:rPr>
-                        <a:t>acima do limite de 1 dia</a:t>
+                        <a:t>dentro do limite</a:t>
                       </a:r>
                     </a:p>
                   </a:txBody>
@@ -4081,11 +4081,11 @@
                       <a:r>
                         <a:rPr sz="1600" b="1">
                           <a:solidFill>
-                            <a:srgbClr val="13853A"/>
+                            <a:srgbClr val="D94545"/>
                           </a:solidFill>
                           <a:latin typeface="Aptos"/>
                         </a:rPr>
-                        <a:t>0,820 dia</a:t>
+                        <a:t>1,125 dia</a:t>
                       </a:r>
                     </a:p>
                     <a:p>
@@ -4101,7 +4101,7 @@
                           </a:solidFill>
                           <a:latin typeface="Aptos"/>
                         </a:rPr>
-                        <a:t>dentro do limite</a:t>
+                        <a:t>acima do limite de 1 dia</a:t>
                       </a:r>
                     </a:p>
                   </a:txBody>
@@ -4150,7 +4150,7 @@
                 </a:solidFill>
                 <a:latin typeface="Aptos"/>
               </a:rPr>
-              <a:t>Como ler: Produção OK conta apenas ordens de serviço concluídas com sucesso. Fila de 1,125 dia significa que, se nenhuma ordem nova entrar, a equipe do Interior precisa de mais de um dia inteiro só para zerar o que já está aberto.</a:t>
+              <a:t>Como ler: Produção OK conta apenas ordens de serviço concluídas com sucesso. Fila de 1,125 dia significa que, se nenhuma ordem nova entrar, a equipe de Fortaleza precisa de mais de um dia inteiro só para zerar o que já está aberto.</a:t>
             </a:r>
           </a:p>
         </p:txBody>
@@ -4164,7 +4164,7 @@
         <p:spPr>
           <a:xfrm>
             <a:off x="533400" y="4476750"/>
-            <a:ext cx="5191125" cy="1409700"/>
+            <a:ext cx="5191125" cy="1600200"/>
           </a:xfrm>
           <a:prstGeom prst="roundRect">
             <a:avLst>
@@ -4249,7 +4249,7 @@
         <p:spPr>
           <a:xfrm>
             <a:off x="762000" y="4819650"/>
-            <a:ext cx="4743450" cy="952500"/>
+            <a:ext cx="4743450" cy="1123950"/>
           </a:xfrm>
           <a:prstGeom prst="rect">
             <a:avLst/>
@@ -4268,13 +4268,13 @@
               </a:lnSpc>
             </a:pPr>
             <a:r>
-              <a:rPr sz="1550" b="1">
+              <a:rPr sz="1450" b="1">
                 <a:solidFill>
                   <a:srgbClr val="FFFFFF"/>
                 </a:solidFill>
                 <a:latin typeface="Aptos"/>
               </a:rPr>
-              <a:t>Concentrar a semana em Fortaleza e proteger o Prazo no Interior. A execução começa nominal: 3 áreas e 15 técnicos definem metade da recuperação.</a:t>
+              <a:t>Concentrar a semana em Fortaleza — também na fila, que estourou o limite — e proteger a margem mínima do Prazo no Interior. Execução nominal: 3 áreas e 15 técnicos definem metade da recuperação.</a:t>
             </a:r>
           </a:p>
         </p:txBody>
@@ -4288,7 +4288,7 @@
         <p:spPr>
           <a:xfrm>
             <a:off x="5953125" y="4476750"/>
-            <a:ext cx="1809750" cy="1409700"/>
+            <a:ext cx="1809750" cy="1600200"/>
           </a:xfrm>
           <a:prstGeom prst="roundRect">
             <a:avLst>
@@ -4375,7 +4375,7 @@
         <p:spPr>
           <a:xfrm>
             <a:off x="6096000" y="4972050"/>
-            <a:ext cx="1543050" cy="800100"/>
+            <a:ext cx="1543050" cy="990600"/>
           </a:xfrm>
           <a:prstGeom prst="rect">
             <a:avLst/>
@@ -4414,7 +4414,7 @@
         <p:spPr>
           <a:xfrm>
             <a:off x="7877175" y="4476750"/>
-            <a:ext cx="1809750" cy="1409700"/>
+            <a:ext cx="1809750" cy="1600200"/>
           </a:xfrm>
           <a:prstGeom prst="roundRect">
             <a:avLst>
@@ -4501,7 +4501,7 @@
         <p:spPr>
           <a:xfrm>
             <a:off x="8020050" y="4972050"/>
-            <a:ext cx="1543050" cy="800100"/>
+            <a:ext cx="1543050" cy="990600"/>
           </a:xfrm>
           <a:prstGeom prst="rect">
             <a:avLst/>
@@ -4540,7 +4540,7 @@
         <p:spPr>
           <a:xfrm>
             <a:off x="9801225" y="4476750"/>
-            <a:ext cx="1809750" cy="1409700"/>
+            <a:ext cx="1809750" cy="1600200"/>
           </a:xfrm>
           <a:prstGeom prst="roundRect">
             <a:avLst>
@@ -4627,7 +4627,7 @@
         <p:spPr>
           <a:xfrm>
             <a:off x="9944100" y="4972050"/>
-            <a:ext cx="1543050" cy="800100"/>
+            <a:ext cx="1543050" cy="990600"/>
           </a:xfrm>
           <a:prstGeom prst="rect">
             <a:avLst/>
@@ -12043,7 +12043,7 @@
                           </a:solidFill>
                           <a:latin typeface="Aptos"/>
                         </a:rPr>
-                        <a:t>Fila do Interior acima do limite</a:t>
+                        <a:t>Fila de Fortaleza acima do limite</a:t>
                       </a:r>
                     </a:p>
                     <a:p>
@@ -12059,7 +12059,7 @@
                           </a:solidFill>
                           <a:latin typeface="Aptos"/>
                         </a:rPr>
-                        <a:t>1,125 dia de trabalho acumulado em 06/07</a:t>
+                        <a:t>1,125 dia em 06/07 (Interior em 0,820, dentro do limite)</a:t>
                       </a:r>
                     </a:p>
                   </a:txBody>
@@ -12183,7 +12183,7 @@
                           </a:solidFill>
                           <a:latin typeface="Aptos"/>
                         </a:rPr>
-                        <a:t>José Geraldo (GO), Francisco Cleiton e GAs do Interior</a:t>
+                        <a:t>José Nilton (GO), Jefferson Oliveira e GAs de Fortaleza</a:t>
                       </a:r>
                     </a:p>
                   </a:txBody>
